--- a/docs/VELO-PITCH-EN.pptx
+++ b/docs/VELO-PITCH-EN.pptx
@@ -2284,7 +2284,7 @@
                 <a:ea typeface="Arial" pitchFamily="34" charset="-122"/>
                 <a:cs typeface="Arial" pitchFamily="34" charset="-120"/>
               </a:rPr>
-              <a:t>MIDNIGHT HACK BUENOS AIRES</a:t>
+              <a:t>MIDNIGHT / COMPACT</a:t>
             </a:r>
             <a:endParaRPr lang="en-US" sz="1100" dirty="0"/>
           </a:p>
